--- a/_기능별 경로 가이드 — 결과 보고 발표 (2026-10-02).pptx
+++ b/_기능별 경로 가이드 — 결과 보고 발표 (2026-10-02).pptx
@@ -2411,7 +2411,7 @@
                 <a:cs typeface="+mn-cs"/>
                 <a:sym typeface="Helvetica"/>
               </a:rPr>
-              <a:t>숫자 네 개만 기억하시면 됩니다. 8단계 중 7단계 완료. Claude가 제대로 아는지 확인하는 질문 23개를 전부 통과했고, 셋업 점검 28개 항목도 전부 통과했습니다. 남은 건 두 분의 셋업입니다. 이 결과의 근거는 아래 줄입니다. 원본 영상 100개를 녹화해 판독했고, 판정 138건이 나왔으며, 이를 바탕으로 CdBd 기능 78개를 11개 영역으로 정의했습니다. 그중 71개는 영상으로 직접 확인한 항목입니다.</a:t>
+              <a:t>숫자 네 개만 기억하시면 됩니다. 8단계 중 7단계 완료. Claude가 제대로 아는지 확인하는 질문 23개를 전부 통과했고, 셋업 점검 28개 항목도 전부 통과했습니다. 남은 건 두 분의 셋업입니다. 이 결과의 근거는 아래 줄입니다. 원본 영상 100개를 녹화해 판독했고, 판정 138건이 나왔으며, 이를 바탕으로 CdBd 기능 71개를 10개 영역으로 정의했습니다. 71개 모두 영상으로 동작을 확인했고, 그중 20개는 세부 일부가 아직 미확인이라 Claude가 그 부분은 모른다고 답합니다.</a:t>
             </a:r>
           </a:p>
         </p:txBody>
@@ -26208,7 +26208,7 @@
       </p:sp>
       <p:sp>
         <p:nvSpPr>
-          <p:cNvPr id="125" name="이 결과의 근거   녹화 영상 100개  ·  영상 판독 판정 138건  ·  정의된 CdBd 기능 78개 (11개 영역 · 그중 71개 영상 실측)"/>
+          <p:cNvPr id="125" name="이 결과의 근거   녹화 영상 100개  ·  영상 판독 판정 138건  ·  정의된 CdBd 기능 71개 (10개 영역 · 전부 영상으로 확인 · 그중 20개는 세부 일부 미확인)"/>
           <p:cNvSpPr txBox="1"/>
           <p:nvPr/>
         </p:nvSpPr>
@@ -26503,7 +26503,7 @@
                 <a:cs typeface="Pretendard Bold"/>
                 <a:sym typeface="Pretendard Bold"/>
               </a:rPr>
-              <a:t>78</a:t>
+              <a:t>71</a:t>
             </a:r>
             <a:r>
               <a:rPr b="1" sz="1050">
@@ -26520,7 +26520,7 @@
                   <a:srgbClr val="6E6E73"/>
                 </a:solidFill>
               </a:rPr>
-              <a:t> (11</a:t>
+              <a:t> (10</a:t>
             </a:r>
             <a:r>
               <a:rPr sz="1050">
@@ -26553,6 +26553,66 @@
                 <a:sym typeface="Helvetica"/>
               </a:rPr>
               <a:t>영역</a:t>
+            </a:r>
+            <a:r>
+              <a:rPr sz="1050">
+                <a:solidFill>
+                  <a:srgbClr val="6E6E73"/>
+                </a:solidFill>
+              </a:rPr>
+              <a:t> · </a:t>
+            </a:r>
+            <a:r>
+              <a:rPr sz="1050">
+                <a:solidFill>
+                  <a:srgbClr val="6E6E73"/>
+                </a:solidFill>
+                <a:latin typeface="+mn-lt"/>
+                <a:ea typeface="+mn-ea"/>
+                <a:cs typeface="+mn-cs"/>
+                <a:sym typeface="Helvetica"/>
+              </a:rPr>
+              <a:t>전부</a:t>
+            </a:r>
+            <a:r>
+              <a:rPr sz="1050">
+                <a:solidFill>
+                  <a:srgbClr val="6E6E73"/>
+                </a:solidFill>
+              </a:rPr>
+              <a:t> </a:t>
+            </a:r>
+            <a:r>
+              <a:rPr sz="1050">
+                <a:solidFill>
+                  <a:srgbClr val="6E6E73"/>
+                </a:solidFill>
+                <a:latin typeface="+mn-lt"/>
+                <a:ea typeface="+mn-ea"/>
+                <a:cs typeface="+mn-cs"/>
+                <a:sym typeface="Helvetica"/>
+              </a:rPr>
+              <a:t>영상으로</a:t>
+            </a:r>
+            <a:r>
+              <a:rPr sz="1050">
+                <a:solidFill>
+                  <a:srgbClr val="6E6E73"/>
+                </a:solidFill>
+              </a:rPr>
+              <a:t> </a:t>
+            </a:r>
+            <a:r>
+              <a:rPr sz="1050">
+                <a:solidFill>
+                  <a:srgbClr val="6E6E73"/>
+                </a:solidFill>
+                <a:latin typeface="+mn-lt"/>
+                <a:ea typeface="+mn-ea"/>
+                <a:cs typeface="+mn-cs"/>
+                <a:sym typeface="Helvetica"/>
+              </a:rPr>
+              <a:t>확인</a:t>
             </a:r>
             <a:r>
               <a:rPr sz="1050">
@@ -26589,7 +26649,7 @@
                 <a:cs typeface="Pretendard Bold"/>
                 <a:sym typeface="Pretendard Bold"/>
               </a:rPr>
-              <a:t>71</a:t>
+              <a:t>20</a:t>
             </a:r>
             <a:r>
               <a:rPr b="1" sz="1050">
@@ -26605,40 +26665,72 @@
                 <a:solidFill>
                   <a:srgbClr val="6E6E73"/>
                 </a:solidFill>
-              </a:rPr>
-              <a:t> </a:t>
+                <a:latin typeface="+mn-lt"/>
+                <a:ea typeface="+mn-ea"/>
+                <a:cs typeface="+mn-cs"/>
+                <a:sym typeface="Helvetica"/>
+              </a:rPr>
+              <a:t>는</a:t>
             </a:r>
             <a:r>
               <a:rPr sz="1050">
                 <a:solidFill>
                   <a:srgbClr val="6E6E73"/>
                 </a:solidFill>
-                <a:latin typeface="+mn-lt"/>
-                <a:ea typeface="+mn-ea"/>
-                <a:cs typeface="+mn-cs"/>
-                <a:sym typeface="Helvetica"/>
-              </a:rPr>
-              <a:t>영상</a:t>
+              </a:rPr>
+              <a:t> </a:t>
             </a:r>
             <a:r>
               <a:rPr sz="1050">
                 <a:solidFill>
                   <a:srgbClr val="6E6E73"/>
                 </a:solidFill>
-              </a:rPr>
-              <a:t> </a:t>
+                <a:latin typeface="+mn-lt"/>
+                <a:ea typeface="+mn-ea"/>
+                <a:cs typeface="+mn-cs"/>
+                <a:sym typeface="Helvetica"/>
+              </a:rPr>
+              <a:t>세부</a:t>
             </a:r>
             <a:r>
               <a:rPr sz="1050">
                 <a:solidFill>
                   <a:srgbClr val="6E6E73"/>
                 </a:solidFill>
-                <a:latin typeface="+mn-lt"/>
-                <a:ea typeface="+mn-ea"/>
-                <a:cs typeface="+mn-cs"/>
-                <a:sym typeface="Helvetica"/>
-              </a:rPr>
-              <a:t>실측</a:t>
+              </a:rPr>
+              <a:t> </a:t>
+            </a:r>
+            <a:r>
+              <a:rPr sz="1050">
+                <a:solidFill>
+                  <a:srgbClr val="6E6E73"/>
+                </a:solidFill>
+                <a:latin typeface="+mn-lt"/>
+                <a:ea typeface="+mn-ea"/>
+                <a:cs typeface="+mn-cs"/>
+                <a:sym typeface="Helvetica"/>
+              </a:rPr>
+              <a:t>일부</a:t>
+            </a:r>
+            <a:r>
+              <a:rPr sz="1050">
+                <a:solidFill>
+                  <a:srgbClr val="6E6E73"/>
+                </a:solidFill>
+              </a:rPr>
+              <a:t> </a:t>
+            </a:r>
+            <a:r>
+              <a:rPr sz="1050">
+                <a:solidFill>
+                  <a:srgbClr val="6E6E73"/>
+                </a:solidFill>
+                <a:latin typeface="+mn-lt"/>
+                <a:ea typeface="+mn-ea"/>
+                <a:cs typeface="+mn-cs"/>
+                <a:sym typeface="Helvetica"/>
+              </a:rPr>
+              <a:t>미확인</a:t>
             </a:r>
             <a:r>
               <a:rPr sz="1050">
